--- a/05-AI应用基础48课时版/V2授课PPT/W12-第7次课-XGBoost参数调优（.pptx
+++ b/05-AI应用基础48课时版/V2授课PPT/W12-第7次课-XGBoost参数调优（.pptx
@@ -6465,7 +6465,7 @@
                 </a:solidFill>
                 <a:latin typeface="微软雅黑"/>
               </a:rPr>
-              <a:t>第17周 · 第7次课（2课时 · 80分钟）</a:t>
+              <a:t>第12周 · 第7次课（2课时 · 80分钟）</a:t>
             </a:r>
           </a:p>
           <a:p>
@@ -60336,7 +60336,7 @@
                 </a:solidFill>
                 <a:latin typeface="微软雅黑"/>
               </a:rPr>
-              <a:t>下次课预告（第13周）</a:t>
+              <a:t>下次课预告（第12周）</a:t>
             </a:r>
           </a:p>
         </p:txBody>
